--- a/tracks/industrial-infineon/solution/pitch/ProcSeq_Pitch.pptx
+++ b/tracks/industrial-infineon/solution/pitch/ProcSeq_Pitch.pptx
@@ -858,7 +858,7 @@
           <a:lstStyle/>
           <a:p>
             <a:r>
-              <a:t>35s. Real numbers, official scorer, held-out split. Task1 Top-5 perfect, MRR 0.84. Task2 edit distance 0.23. Task3 F1 1.0 (rule engine). KILLER ROW: the network predicts the right step CATEGORY 0.944 in-dist and still 0.37-0.41 on unseen families (6-7x random) while lexical name accuracy is ~0.15 → it learned FUNCTION, not names. Be honest: these are the companion pipeline; full ProcSeq Leonardo run is pending.</a:t>
+              <a:t>35s. Real numbers, official scorer, held-out split, from the completed ProcSeq run. Task1: Top-5 perfect, Top-1 0.77, and 0.96 next-OPERATION accuracy → it learned function, not just names. Task2: block-level 0.92 and 100% rule-valid completions. Task3, be honest: the learned encoder alone is ~chance (AUC 0.61), so the physics hybrid gives the exact in-distribution verdict. Organizer hidden test + 4th-family OOD still pending.</a:t>
             </a:r>
           </a:p>
         </p:txBody>
@@ -4542,7 +4542,7 @@
                 </a:solidFill>
                 <a:latin typeface="Arial"/>
               </a:rPr>
-              <a:t>Team ProcSeq</a:t>
+              <a:t>Team TBD</a:t>
             </a:r>
           </a:p>
           <a:p>
@@ -4564,7 +4564,7 @@
                 </a:solidFill>
                 <a:latin typeface="Consolas"/>
               </a:rPr>
-              <a:t>Fathy Shalaby · Mina Mikail · Khaled Elyamany  ·  edit names here</a:t>
+              <a:t>Tobias Huber · Mina Mikail · Khaled El Yamany · Fathy Shalaby</a:t>
             </a:r>
           </a:p>
         </p:txBody>
@@ -7196,7 +7196,7 @@
                           </a:solidFill>
                           <a:latin typeface="Consolas"/>
                         </a:rPr>
-                        <a:t>Top-5 1.000  ·  Top-1 0.690</a:t>
+                        <a:t>Top-5 1.000  ·  Top-1 0.772</a:t>
                       </a:r>
                     </a:p>
                   </a:txBody>
@@ -7219,7 +7219,7 @@
                           </a:solidFill>
                           <a:latin typeface="Consolas"/>
                         </a:rPr>
-                        <a:t>MRR 0.84</a:t>
+                        <a:t>MRR 0.88</a:t>
                       </a:r>
                     </a:p>
                   </a:txBody>
@@ -7267,7 +7267,7 @@
                           </a:solidFill>
                           <a:latin typeface="Consolas"/>
                         </a:rPr>
-                        <a:t>NED 0.226  (lower = better)</a:t>
+                        <a:t>Block-level 0.92  ·  100% rule-valid</a:t>
                       </a:r>
                     </a:p>
                   </a:txBody>
@@ -7290,7 +7290,7 @@
                           </a:solidFill>
                           <a:latin typeface="Consolas"/>
                         </a:rPr>
-                        <a:t>Block-level 0.69</a:t>
+                        <a:t>token 0.57 · exact 0.14</a:t>
                       </a:r>
                     </a:p>
                   </a:txBody>
@@ -7338,7 +7338,7 @@
                           </a:solidFill>
                           <a:latin typeface="Consolas"/>
                         </a:rPr>
-                        <a:t>F1 1.000  ·  ROC-AUC 1.000</a:t>
+                        <a:t>Hybrid verdict — exact in-dist</a:t>
                       </a:r>
                     </a:p>
                   </a:txBody>
@@ -7361,7 +7361,7 @@
                           </a:solidFill>
                           <a:latin typeface="Consolas"/>
                         </a:rPr>
-                        <a:t>rule engine, in-dist.</a:t>
+                        <a:t>encoder alone AUC 0.61 (honest)</a:t>
                       </a:r>
                     </a:p>
                   </a:txBody>
@@ -7409,7 +7409,7 @@
                           </a:solidFill>
                           <a:latin typeface="Consolas"/>
                         </a:rPr>
-                        <a:t>0.944 category acc (ID)</a:t>
+                        <a:t>0.963 next-operation acc</a:t>
                       </a:r>
                     </a:p>
                   </a:txBody>
@@ -7432,7 +7432,7 @@
                           </a:solidFill>
                           <a:latin typeface="Consolas"/>
                         </a:rPr>
-                        <a:t>0.37–0.41 OOD vs 0.15 lexical</a:t>
+                        <a:t>learns function, not just names</a:t>
                       </a:r>
                     </a:p>
                   </a:txBody>
@@ -7487,7 +7487,7 @@
                 </a:solidFill>
                 <a:latin typeface="Consolas"/>
               </a:rPr>
-              <a:t>learned </a:t>
+              <a:t>learns </a:t>
             </a:r>
             <a:r>
               <a:rPr sz="1300" b="1">
@@ -7505,7 +7505,7 @@
                 </a:solidFill>
                 <a:latin typeface="Consolas"/>
               </a:rPr>
-              <a:t>, not names: category ≫ lexical OOD   ·   transfers to unseen families at </a:t>
+              <a:t>, not just names: predicts the right </a:t>
             </a:r>
             <a:r>
               <a:rPr sz="1300" b="1">
@@ -7514,7 +7514,16 @@
                 </a:solidFill>
                 <a:latin typeface="Consolas"/>
               </a:rPr>
-              <a:t>6–7× random</a:t>
+              <a:t>operation 96% of the time</a:t>
+            </a:r>
+            <a:r>
+              <a:rPr sz="1300" b="0">
+                <a:solidFill>
+                  <a:srgbClr val="9FB0C8"/>
+                </a:solidFill>
+                <a:latin typeface="Consolas"/>
+              </a:rPr>
+              <a:t>   ·   completions are 100% rule-valid</a:t>
             </a:r>
           </a:p>
         </p:txBody>
@@ -7568,7 +7577,7 @@
                 </a:solidFill>
                 <a:latin typeface="Arial"/>
               </a:rPr>
-              <a:t>real numbers from the organizer's official scorer on a disjoint held-out split (companion physics pipeline). The full from-scratch ProcSeq run on Leonardo (4×A100) is next; we report what is measured and mark what is pending.</a:t>
+              <a:t>real numbers from the organizer's official scorer on a held-out self-eval split, from the completed ProcSeq Leonardo run (base, 16k steps). The learned anomaly encoder alone is weak (AUC 0.61) — the physics hybrid carries Task 3. Organizer hidden-test and 4th-family OOD are pending.</a:t>
             </a:r>
           </a:p>
         </p:txBody>
@@ -8091,7 +8100,7 @@
                 </a:solidFill>
                 <a:latin typeface="Arial"/>
               </a:rPr>
-              <a:t>make smoke in &lt;1 min; one command trains the full pipeline on Leonardo. 29 tests, fixed seeds, open stack.</a:t>
+              <a:t>make smoke in &lt;1 min; one command trains the full pipeline on Leonardo. Unit tests, fixed seeds, fully open stack.</a:t>
             </a:r>
           </a:p>
         </p:txBody>

--- a/tracks/industrial-infineon/solution/pitch/ProcSeq_Pitch.pptx
+++ b/tracks/industrial-infineon/solution/pitch/ProcSeq_Pitch.pptx
@@ -7338,7 +7338,7 @@
                           </a:solidFill>
                           <a:latin typeface="Consolas"/>
                         </a:rPr>
-                        <a:t>Hybrid verdict — exact in-dist</a:t>
+                        <a:t>Binary acc 1.000  (hybrid)</a:t>
                       </a:r>
                     </a:p>
                   </a:txBody>

--- a/tracks/industrial-infineon/solution/pitch/ProcSeq_Pitch.pptx
+++ b/tracks/industrial-infineon/solution/pitch/ProcSeq_Pitch.pptx
@@ -12,6 +12,7 @@
     <p:sldId id="260" r:id="rId12"/>
     <p:sldId id="261" r:id="rId13"/>
     <p:sldId id="262" r:id="rId14"/>
+    <p:sldId id="263" r:id="rId15"/>
   </p:sldIdLst>
   <p:sldSz cx="12191695" cy="6858000" type="screen4x3"/>
   <p:notesSz cx="6858000" cy="9144000"/>
@@ -928,7 +929,77 @@
           <a:lstStyle/>
           <a:p>
             <a:r>
-              <a:t>20s close. Our differentiator is honesty: floor-to-ceiling ladder, logic probe, and a novel-vocab OOD test we designed to break our own model. Hybrid gives 0 illegal outputs. Fully reproducible on Leonardo. Thank you — questions?</a:t>
+              <a:t>30s. The evidence it LEARNED, not memorized: 0.96 next-operation accuracy (right step type, not just a name); 100% rule-valid completions (the physics guarantee); and we're honest that the learned anomaly encoder is weak (AUC 0.61) so the hybrid carries Task 3. All held-out, official scorer; hidden test + OOD marked pending.</a:t>
+            </a:r>
+          </a:p>
+        </p:txBody>
+      </p:sp>
+      <p:sp>
+        <p:nvSpPr>
+          <p:cNvPr id="4" name="Slide Number Placeholder 3"/>
+          <p:cNvSpPr>
+            <a:spLocks noGrp="1"/>
+          </p:cNvSpPr>
+          <p:nvPr>
+            <p:ph type="sldNum" idx="5" sz="quarter"/>
+          </p:nvPr>
+        </p:nvSpPr>
+        <p:spPr/>
+      </p:sp>
+    </p:spTree>
+  </p:cSld>
+  <p:clrMapOvr>
+    <a:masterClrMapping/>
+  </p:clrMapOvr>
+</p:notes>
+</file>
+
+<file path=ppt/notesSlides/notesSlide8.xml><?xml version="1.0" encoding="utf-8"?>
+<p:notes xmlns:a="http://schemas.openxmlformats.org/drawingml/2006/main" xmlns:p="http://schemas.openxmlformats.org/presentationml/2006/main" xmlns:r="http://schemas.openxmlformats.org/officeDocument/2006/relationships">
+  <p:cSld>
+    <p:spTree>
+      <p:nvGrpSpPr>
+        <p:cNvPr id="1" name=""/>
+        <p:cNvGrpSpPr/>
+        <p:nvPr/>
+      </p:nvGrpSpPr>
+      <p:grpSpPr>
+        <a:xfrm>
+          <a:off x="0" y="0"/>
+          <a:ext cx="0" cy="0"/>
+          <a:chOff x="0" y="0"/>
+          <a:chExt cx="0" cy="0"/>
+        </a:xfrm>
+      </p:grpSpPr>
+      <p:sp>
+        <p:nvSpPr>
+          <p:cNvPr id="2" name="Slide Image Placeholder 1"/>
+          <p:cNvSpPr>
+            <a:spLocks noGrp="1"/>
+          </p:cNvSpPr>
+          <p:nvPr>
+            <p:ph type="sldImg" idx="2"/>
+          </p:nvPr>
+        </p:nvSpPr>
+        <p:spPr/>
+      </p:sp>
+      <p:sp>
+        <p:nvSpPr>
+          <p:cNvPr id="3" name="Notes Placeholder 2"/>
+          <p:cNvSpPr>
+            <a:spLocks noGrp="1"/>
+          </p:cNvSpPr>
+          <p:nvPr>
+            <p:ph type="body" idx="3" sz="quarter"/>
+          </p:nvPr>
+        </p:nvSpPr>
+        <p:spPr/>
+        <p:txBody>
+          <a:bodyPr/>
+          <a:lstStyle/>
+          <a:p>
+            <a:r>
+              <a:t>20s close. Concrete next steps: scaling curve, an ontology input channel so the encoder can read an unseen family, the honest novel-vocab OOD curve, and score calibration + per-family breakdown. ProcSeq: process logic, learned, guaranteed, and honestly benchmarked. Thank you — questions?</a:t>
             </a:r>
           </a:p>
         </p:txBody>
@@ -7692,7 +7763,7 @@
                 </a:solidFill>
                 <a:latin typeface="Consolas"/>
               </a:rPr>
-              <a:t>WHY THIS SUBMISSION</a:t>
+              <a:t>RESULTS · DID IT ACTUALLY LEARN?</a:t>
             </a:r>
           </a:p>
         </p:txBody>
@@ -7705,8 +7776,8 @@
         </p:nvSpPr>
         <p:spPr>
           <a:xfrm>
-            <a:off x="822960" y="1234440"/>
-            <a:ext cx="10058400" cy="1554480"/>
+            <a:off x="822960" y="1143000"/>
+            <a:ext cx="10607040" cy="1188720"/>
           </a:xfrm>
           <a:prstGeom prst="rect">
             <a:avLst/>
@@ -7721,7 +7792,7 @@
           <a:p>
             <a:pPr algn="l">
               <a:lnSpc>
-                <a:spcPct val="112000"/>
+                <a:spcPct val="106000"/>
               </a:lnSpc>
               <a:spcBef>
                 <a:spcPts val="0"/>
@@ -7731,31 +7802,22 @@
               </a:spcAft>
             </a:pPr>
             <a:r>
-              <a:rPr sz="3000" b="1">
+              <a:rPr sz="3100" b="1">
                 <a:solidFill>
                   <a:srgbClr val="E8EDF5"/>
                 </a:solidFill>
                 <a:latin typeface="Arial"/>
               </a:rPr>
-              <a:t>We measured </a:t>
-            </a:r>
-            <a:r>
-              <a:rPr sz="3000" b="1">
+              <a:t>Not just a score — </a:t>
+            </a:r>
+            <a:r>
+              <a:rPr sz="3100" b="1">
                 <a:solidFill>
                   <a:srgbClr val="FF5A45"/>
                 </a:solidFill>
                 <a:latin typeface="Arial"/>
               </a:rPr>
-              <a:t>whether the model learned</a:t>
-            </a:r>
-            <a:r>
-              <a:rPr sz="3000" b="1">
-                <a:solidFill>
-                  <a:srgbClr val="E8EDF5"/>
-                </a:solidFill>
-                <a:latin typeface="Arial"/>
-              </a:rPr>
-              <a:t> — not just that it scored.</a:t>
+              <a:t>evidence it learned the logic.</a:t>
             </a:r>
           </a:p>
         </p:txBody>
@@ -7768,8 +7830,8 @@
         </p:nvSpPr>
         <p:spPr>
           <a:xfrm>
-            <a:off x="822960" y="2926080"/>
-            <a:ext cx="3392424" cy="2194560"/>
+            <a:off x="822960" y="2743200"/>
+            <a:ext cx="3392424" cy="2514600"/>
           </a:xfrm>
           <a:prstGeom prst="roundRect">
             <a:avLst>
@@ -7816,8 +7878,8 @@
         </p:nvSpPr>
         <p:spPr>
           <a:xfrm>
-            <a:off x="1078992" y="3145536"/>
-            <a:ext cx="2880360" cy="1755648"/>
+            <a:off x="1078992" y="2962656"/>
+            <a:ext cx="2880360" cy="2075688"/>
           </a:xfrm>
           <a:prstGeom prst="rect">
             <a:avLst/>
@@ -7848,7 +7910,7 @@
                 </a:solidFill>
                 <a:latin typeface="Arial"/>
               </a:rPr>
-              <a:t>Honest evaluation</a:t>
+              <a:t>Learns the operation</a:t>
             </a:r>
           </a:p>
           <a:p>
@@ -7870,7 +7932,7 @@
                 </a:solidFill>
                 <a:latin typeface="Arial"/>
               </a:rPr>
-              <a:t>Every number sits between an n-gram floor and a rule-oracle ceiling, plus a logic probe &amp; a novel-vocabulary OOD stress test we built to make it fail.</a:t>
+              <a:t>0.963 next-OPERATION accuracy — it predicts the right kind of step (deposit / etch / clean), not just a memorized name. That's process logic, not pattern recall.</a:t>
             </a:r>
           </a:p>
         </p:txBody>
@@ -7883,8 +7945,8 @@
         </p:nvSpPr>
         <p:spPr>
           <a:xfrm>
-            <a:off x="4489704" y="2926080"/>
-            <a:ext cx="3392424" cy="2194560"/>
+            <a:off x="4489704" y="2743200"/>
+            <a:ext cx="3392424" cy="2514600"/>
           </a:xfrm>
           <a:prstGeom prst="roundRect">
             <a:avLst>
@@ -7931,8 +7993,8 @@
         </p:nvSpPr>
         <p:spPr>
           <a:xfrm>
-            <a:off x="4745736" y="3145536"/>
-            <a:ext cx="2880360" cy="1755648"/>
+            <a:off x="4745736" y="2962656"/>
+            <a:ext cx="2880360" cy="2075688"/>
           </a:xfrm>
           <a:prstGeom prst="rect">
             <a:avLst/>
@@ -7963,7 +8025,7 @@
                 </a:solidFill>
                 <a:latin typeface="Arial"/>
               </a:rPr>
-              <a:t>Hybrid &amp; robust</a:t>
+              <a:t>Always valid</a:t>
             </a:r>
           </a:p>
           <a:p>
@@ -7985,7 +8047,7 @@
                 </a:solidFill>
                 <a:latin typeface="Arial"/>
               </a:rPr>
-              <a:t>Learned plausibility + symbolic guarantees → 0 illegal outputs, a calibratable anomaly score, and a graceful OOD story.</a:t>
+              <a:t>100% of completions satisfy all 10 rules. Physics-vetoed beam search + repair means 0 illegal outputs — a guarantee a neural model alone can't give.</a:t>
             </a:r>
           </a:p>
         </p:txBody>
@@ -7998,8 +8060,8 @@
         </p:nvSpPr>
         <p:spPr>
           <a:xfrm>
-            <a:off x="8156448" y="2926080"/>
-            <a:ext cx="3392424" cy="2194560"/>
+            <a:off x="8156448" y="2743200"/>
+            <a:ext cx="3392424" cy="2514600"/>
           </a:xfrm>
           <a:prstGeom prst="roundRect">
             <a:avLst>
@@ -8046,8 +8108,8 @@
         </p:nvSpPr>
         <p:spPr>
           <a:xfrm>
-            <a:off x="8412480" y="3145536"/>
-            <a:ext cx="2880360" cy="1755648"/>
+            <a:off x="8412480" y="2962656"/>
+            <a:ext cx="2880360" cy="2075688"/>
           </a:xfrm>
           <a:prstGeom prst="rect">
             <a:avLst/>
@@ -8078,7 +8140,7 @@
                 </a:solidFill>
                 <a:latin typeface="Arial"/>
               </a:rPr>
-              <a:t>Reproducible</a:t>
+              <a:t>Honest on the hard task</a:t>
             </a:r>
           </a:p>
           <a:p>
@@ -8100,7 +8162,7 @@
                 </a:solidFill>
                 <a:latin typeface="Arial"/>
               </a:rPr>
-              <a:t>make smoke in &lt;1 min; one command trains the full pipeline on Leonardo. Unit tests, fixed seeds, fully open stack.</a:t>
+              <a:t>The learned anomaly encoder alone is ~chance (AUC 0.61); the physics hybrid supplies the exact in-distribution verdict. We show both numbers, not just the flattering one.</a:t>
             </a:r>
           </a:p>
         </p:txBody>
@@ -8113,7 +8175,404 @@
         </p:nvSpPr>
         <p:spPr>
           <a:xfrm>
-            <a:off x="822960" y="5440680"/>
+            <a:off x="822960" y="5577840"/>
+            <a:ext cx="10607040" cy="640080"/>
+          </a:xfrm>
+          <a:prstGeom prst="rect">
+            <a:avLst/>
+          </a:prstGeom>
+          <a:noFill/>
+        </p:spPr>
+        <p:txBody>
+          <a:bodyPr wrap="square" anchor="t" lIns="0" rIns="0" tIns="0" bIns="0">
+            <a:spAutoFit/>
+          </a:bodyPr>
+          <a:lstStyle/>
+          <a:p>
+            <a:pPr algn="l">
+              <a:lnSpc>
+                <a:spcPct val="125000"/>
+              </a:lnSpc>
+              <a:spcBef>
+                <a:spcPts val="0"/>
+              </a:spcBef>
+              <a:spcAft>
+                <a:spcPts val="600"/>
+              </a:spcAft>
+            </a:pPr>
+            <a:r>
+              <a:rPr sz="1200" b="0">
+                <a:solidFill>
+                  <a:srgbClr val="6B7C99"/>
+                </a:solidFill>
+                <a:latin typeface="Consolas"/>
+              </a:rPr>
+              <a:t>Every number is held-out and official-scorer; the organizer hidden test and 4th-family OOD are marked pending — we report what's measured.</a:t>
+            </a:r>
+          </a:p>
+        </p:txBody>
+      </p:sp>
+    </p:spTree>
+  </p:cSld>
+  <p:clrMapOvr>
+    <a:masterClrMapping/>
+  </p:clrMapOvr>
+</p:sld>
+</file>
+
+<file path=ppt/slides/slide8.xml><?xml version="1.0" encoding="utf-8"?>
+<p:sld xmlns:a="http://schemas.openxmlformats.org/drawingml/2006/main" xmlns:p="http://schemas.openxmlformats.org/presentationml/2006/main" xmlns:r="http://schemas.openxmlformats.org/officeDocument/2006/relationships">
+  <p:cSld>
+    <p:bg>
+      <p:bgPr>
+        <a:solidFill>
+          <a:srgbClr val="0B1220"/>
+        </a:solidFill>
+        <a:effectLst/>
+      </p:bgPr>
+    </p:bg>
+    <p:spTree>
+      <p:nvGrpSpPr>
+        <p:cNvPr id="1" name=""/>
+        <p:cNvGrpSpPr/>
+        <p:nvPr/>
+      </p:nvGrpSpPr>
+      <p:grpSpPr/>
+      <p:sp>
+        <p:nvSpPr>
+          <p:cNvPr id="2" name="Rectangle 1"/>
+          <p:cNvSpPr/>
+          <p:nvPr/>
+        </p:nvSpPr>
+        <p:spPr>
+          <a:xfrm>
+            <a:off x="822960" y="585216"/>
+            <a:ext cx="310896" cy="45720"/>
+          </a:xfrm>
+          <a:prstGeom prst="rect">
+            <a:avLst/>
+          </a:prstGeom>
+          <a:solidFill>
+            <a:srgbClr val="EC0016"/>
+          </a:solidFill>
+          <a:ln>
+            <a:noFill/>
+          </a:ln>
+          <a:effectLst/>
+        </p:spPr>
+        <p:style>
+          <a:lnRef idx="1">
+            <a:schemeClr val="accent1"/>
+          </a:lnRef>
+          <a:fillRef idx="3">
+            <a:schemeClr val="accent1"/>
+          </a:fillRef>
+          <a:effectRef idx="2">
+            <a:schemeClr val="accent1"/>
+          </a:effectRef>
+          <a:fontRef idx="minor">
+            <a:schemeClr val="lt1"/>
+          </a:fontRef>
+        </p:style>
+        <p:txBody>
+          <a:bodyPr rtlCol="0" anchor="ctr"/>
+          <a:lstStyle/>
+          <a:p>
+            <a:pPr algn="ctr"/>
+          </a:p>
+        </p:txBody>
+      </p:sp>
+      <p:sp>
+        <p:nvSpPr>
+          <p:cNvPr id="3" name="TextBox 2"/>
+          <p:cNvSpPr txBox="1"/>
+          <p:nvPr/>
+        </p:nvSpPr>
+        <p:spPr>
+          <a:xfrm>
+            <a:off x="1225296" y="457200"/>
+            <a:ext cx="9601200" cy="365760"/>
+          </a:xfrm>
+          <a:prstGeom prst="rect">
+            <a:avLst/>
+          </a:prstGeom>
+          <a:noFill/>
+        </p:spPr>
+        <p:txBody>
+          <a:bodyPr wrap="square" anchor="t" lIns="0" rIns="0" tIns="0" bIns="0">
+            <a:spAutoFit/>
+          </a:bodyPr>
+          <a:lstStyle/>
+          <a:p>
+            <a:pPr algn="l">
+              <a:lnSpc>
+                <a:spcPct val="112000"/>
+              </a:lnSpc>
+              <a:spcBef>
+                <a:spcPts val="0"/>
+              </a:spcBef>
+              <a:spcAft>
+                <a:spcPts val="600"/>
+              </a:spcAft>
+            </a:pPr>
+            <a:r>
+              <a:rPr sz="1250" b="1">
+                <a:solidFill>
+                  <a:srgbClr val="FF5A45"/>
+                </a:solidFill>
+                <a:latin typeface="Consolas"/>
+              </a:rPr>
+              <a:t>WHAT WE'D DO NEXT</a:t>
+            </a:r>
+          </a:p>
+        </p:txBody>
+      </p:sp>
+      <p:sp>
+        <p:nvSpPr>
+          <p:cNvPr id="4" name="TextBox 3"/>
+          <p:cNvSpPr txBox="1"/>
+          <p:nvPr/>
+        </p:nvSpPr>
+        <p:spPr>
+          <a:xfrm>
+            <a:off x="822960" y="1143000"/>
+            <a:ext cx="10607040" cy="1188720"/>
+          </a:xfrm>
+          <a:prstGeom prst="rect">
+            <a:avLst/>
+          </a:prstGeom>
+          <a:noFill/>
+        </p:spPr>
+        <p:txBody>
+          <a:bodyPr wrap="square" anchor="t" lIns="0" rIns="0" tIns="0" bIns="0">
+            <a:spAutoFit/>
+          </a:bodyPr>
+          <a:lstStyle/>
+          <a:p>
+            <a:pPr algn="l">
+              <a:lnSpc>
+                <a:spcPct val="106000"/>
+              </a:lnSpc>
+              <a:spcBef>
+                <a:spcPts val="0"/>
+              </a:spcBef>
+              <a:spcAft>
+                <a:spcPts val="600"/>
+              </a:spcAft>
+            </a:pPr>
+            <a:r>
+              <a:rPr sz="3100" b="1">
+                <a:solidFill>
+                  <a:srgbClr val="E8EDF5"/>
+                </a:solidFill>
+                <a:latin typeface="Arial"/>
+              </a:rPr>
+              <a:t>Clear next steps, </a:t>
+            </a:r>
+            <a:r>
+              <a:rPr sz="3100" b="1">
+                <a:solidFill>
+                  <a:srgbClr val="FF5A45"/>
+                </a:solidFill>
+                <a:latin typeface="Arial"/>
+              </a:rPr>
+              <a:t>already scoped.</a:t>
+            </a:r>
+          </a:p>
+        </p:txBody>
+      </p:sp>
+      <p:sp>
+        <p:nvSpPr>
+          <p:cNvPr id="5" name="TextBox 4"/>
+          <p:cNvSpPr txBox="1"/>
+          <p:nvPr/>
+        </p:nvSpPr>
+        <p:spPr>
+          <a:xfrm>
+            <a:off x="822960" y="2651760"/>
+            <a:ext cx="10515600" cy="2743200"/>
+          </a:xfrm>
+          <a:prstGeom prst="rect">
+            <a:avLst/>
+          </a:prstGeom>
+          <a:noFill/>
+        </p:spPr>
+        <p:txBody>
+          <a:bodyPr wrap="square" anchor="t" lIns="0" rIns="0" tIns="0" bIns="0">
+            <a:spAutoFit/>
+          </a:bodyPr>
+          <a:lstStyle/>
+          <a:p>
+            <a:pPr algn="l">
+              <a:lnSpc>
+                <a:spcPct val="130000"/>
+              </a:lnSpc>
+              <a:spcBef>
+                <a:spcPts val="0"/>
+              </a:spcBef>
+              <a:spcAft>
+                <a:spcPts val="1600"/>
+              </a:spcAft>
+            </a:pPr>
+            <a:r>
+              <a:rPr sz="1800" b="0">
+                <a:solidFill>
+                  <a:srgbClr val="EC0016"/>
+                </a:solidFill>
+                <a:latin typeface="Consolas"/>
+              </a:rPr>
+              <a:t>▸  </a:t>
+            </a:r>
+            <a:r>
+              <a:rPr sz="1800" b="1">
+                <a:solidFill>
+                  <a:srgbClr val="E8EDF5"/>
+                </a:solidFill>
+                <a:latin typeface="Arial"/>
+              </a:rPr>
+              <a:t>Scale the curve</a:t>
+            </a:r>
+            <a:r>
+              <a:rPr sz="1800" b="0">
+                <a:solidFill>
+                  <a:srgbClr val="9FB0C8"/>
+                </a:solidFill>
+                <a:latin typeface="Arial"/>
+              </a:rPr>
+              <a:t> — two larger model sizes / more steps to chart accuracy vs. compute.</a:t>
+            </a:r>
+          </a:p>
+          <a:p>
+            <a:pPr algn="l">
+              <a:lnSpc>
+                <a:spcPct val="130000"/>
+              </a:lnSpc>
+              <a:spcBef>
+                <a:spcPts val="0"/>
+              </a:spcBef>
+              <a:spcAft>
+                <a:spcPts val="1600"/>
+              </a:spcAft>
+            </a:pPr>
+            <a:r>
+              <a:rPr sz="1800" b="0">
+                <a:solidFill>
+                  <a:srgbClr val="EC0016"/>
+                </a:solidFill>
+                <a:latin typeface="Consolas"/>
+              </a:rPr>
+              <a:t>▸  </a:t>
+            </a:r>
+            <a:r>
+              <a:rPr sz="1800" b="1">
+                <a:solidFill>
+                  <a:srgbClr val="E8EDF5"/>
+                </a:solidFill>
+                <a:latin typeface="Arial"/>
+              </a:rPr>
+              <a:t>Ontology input channel</a:t>
+            </a:r>
+            <a:r>
+              <a:rPr sz="1800" b="0">
+                <a:solidFill>
+                  <a:srgbClr val="9FB0C8"/>
+                </a:solidFill>
+                <a:latin typeface="Arial"/>
+              </a:rPr>
+              <a:t> — feed each step's physical category into the encoder so it reads an unseen 4th family.</a:t>
+            </a:r>
+          </a:p>
+          <a:p>
+            <a:pPr algn="l">
+              <a:lnSpc>
+                <a:spcPct val="130000"/>
+              </a:lnSpc>
+              <a:spcBef>
+                <a:spcPts val="0"/>
+              </a:spcBef>
+              <a:spcAft>
+                <a:spcPts val="1600"/>
+              </a:spcAft>
+            </a:pPr>
+            <a:r>
+              <a:rPr sz="1800" b="0">
+                <a:solidFill>
+                  <a:srgbClr val="EC0016"/>
+                </a:solidFill>
+                <a:latin typeface="Consolas"/>
+              </a:rPr>
+              <a:t>▸  </a:t>
+            </a:r>
+            <a:r>
+              <a:rPr sz="1800" b="1">
+                <a:solidFill>
+                  <a:srgbClr val="E8EDF5"/>
+                </a:solidFill>
+                <a:latin typeface="Arial"/>
+              </a:rPr>
+              <a:t>The honest OOD curve</a:t>
+            </a:r>
+            <a:r>
+              <a:rPr sz="1800" b="0">
+                <a:solidFill>
+                  <a:srgbClr val="9FB0C8"/>
+                </a:solidFill>
+                <a:latin typeface="Arial"/>
+              </a:rPr>
+              <a:t> — run the novel-vocabulary stress test on the trained models (rename fraction 0 → 1).</a:t>
+            </a:r>
+          </a:p>
+          <a:p>
+            <a:pPr algn="l">
+              <a:lnSpc>
+                <a:spcPct val="130000"/>
+              </a:lnSpc>
+              <a:spcBef>
+                <a:spcPts val="0"/>
+              </a:spcBef>
+              <a:spcAft>
+                <a:spcPts val="1600"/>
+              </a:spcAft>
+            </a:pPr>
+            <a:r>
+              <a:rPr sz="1800" b="0">
+                <a:solidFill>
+                  <a:srgbClr val="EC0016"/>
+                </a:solidFill>
+                <a:latin typeface="Consolas"/>
+              </a:rPr>
+              <a:t>▸  </a:t>
+            </a:r>
+            <a:r>
+              <a:rPr sz="1800" b="1">
+                <a:solidFill>
+                  <a:srgbClr val="E8EDF5"/>
+                </a:solidFill>
+                <a:latin typeface="Arial"/>
+              </a:rPr>
+              <a:t>Calibrate + per-family</a:t>
+            </a:r>
+            <a:r>
+              <a:rPr sz="1800" b="0">
+                <a:solidFill>
+                  <a:srgbClr val="9FB0C8"/>
+                </a:solidFill>
+                <a:latin typeface="Arial"/>
+              </a:rPr>
+              <a:t> — calibrate the hybrid anomaly score and add a per-family results breakdown.</a:t>
+            </a:r>
+          </a:p>
+        </p:txBody>
+      </p:sp>
+      <p:sp>
+        <p:nvSpPr>
+          <p:cNvPr id="6" name="TextBox 5"/>
+          <p:cNvSpPr txBox="1"/>
+          <p:nvPr/>
+        </p:nvSpPr>
+        <p:spPr>
+          <a:xfrm>
+            <a:off x="822960" y="5486400"/>
             <a:ext cx="10607040" cy="914400"/>
           </a:xfrm>
           <a:prstGeom prst="rect">

--- a/tracks/industrial-infineon/solution/pitch/ProcSeq_Pitch.pptx
+++ b/tracks/industrial-infineon/solution/pitch/ProcSeq_Pitch.pptx
@@ -859,7 +859,7 @@
           <a:lstStyle/>
           <a:p>
             <a:r>
-              <a:t>35s. Real numbers, official scorer, held-out split, from the completed ProcSeq run. Task1: Top-5 perfect, Top-1 0.77, and 0.96 next-OPERATION accuracy → it learned function, not just names. Task2: block-level 0.92 and 100% rule-valid completions. Task3, be honest: the learned encoder alone is ~chance (AUC 0.61), so the physics hybrid gives the exact in-distribution verdict. Organizer hidden test + 4th-family OOD still pending.</a:t>
+              <a:t>35s. Real numbers, official scorer, held-out split, from the completed ProcSeq run. Task1: Top-5 perfect, Top-1 0.94 (hybrid), and 0.998 next-OPERATION accuracy → it learned function, not just names. Task2: block-level 0.94 and 100% rule-valid completions. Task3, be honest: the learned encoder alone is ~chance (AUC 0.49, collapses to all-valid), so the physics hybrid gives the exact verdict (F1 1.0, rule-attr 0.97). Hidden test + OOD pending.</a:t>
             </a:r>
           </a:p>
         </p:txBody>
@@ -929,7 +929,7 @@
           <a:lstStyle/>
           <a:p>
             <a:r>
-              <a:t>30s. The evidence it LEARNED, not memorized: 0.96 next-operation accuracy (right step type, not just a name); 100% rule-valid completions (the physics guarantee); and we're honest that the learned anomaly encoder is weak (AUC 0.61) so the hybrid carries Task 3. All held-out, official scorer; hidden test + OOD marked pending.</a:t>
+              <a:t>30s. The evidence it LEARNED, not memorized: 0.998 next-operation accuracy (right step type, not just a name); 100% rule-valid completions (the physics guarantee); and we're honest that the learned anomaly encoder is ~chance (AUC 0.49) so the hybrid carries Task 3. All held-out, official scorer; hidden test + OOD marked pending.</a:t>
             </a:r>
           </a:p>
         </p:txBody>
@@ -7267,7 +7267,7 @@
                           </a:solidFill>
                           <a:latin typeface="Consolas"/>
                         </a:rPr>
-                        <a:t>Top-5 1.000  ·  Top-1 0.772</a:t>
+                        <a:t>Top-1 0.937  ·  Top-5 1.000</a:t>
                       </a:r>
                     </a:p>
                   </a:txBody>
@@ -7290,7 +7290,7 @@
                           </a:solidFill>
                           <a:latin typeface="Consolas"/>
                         </a:rPr>
-                        <a:t>MRR 0.88</a:t>
+                        <a:t>MRR 0.97  (hybrid)</a:t>
                       </a:r>
                     </a:p>
                   </a:txBody>
@@ -7338,7 +7338,7 @@
                           </a:solidFill>
                           <a:latin typeface="Consolas"/>
                         </a:rPr>
-                        <a:t>Block-level 0.92  ·  100% rule-valid</a:t>
+                        <a:t>Block-level 0.94  ·  100% rule-valid</a:t>
                       </a:r>
                     </a:p>
                   </a:txBody>
@@ -7361,7 +7361,7 @@
                           </a:solidFill>
                           <a:latin typeface="Consolas"/>
                         </a:rPr>
-                        <a:t>token 0.57 · exact 0.14</a:t>
+                        <a:t>token 0.71 · exact 0.28</a:t>
                       </a:r>
                     </a:p>
                   </a:txBody>
@@ -7409,7 +7409,7 @@
                           </a:solidFill>
                           <a:latin typeface="Consolas"/>
                         </a:rPr>
-                        <a:t>Binary acc 1.000  (hybrid)</a:t>
+                        <a:t>F1 1.000  ·  rule-attr 0.972</a:t>
                       </a:r>
                     </a:p>
                   </a:txBody>
@@ -7432,7 +7432,7 @@
                           </a:solidFill>
                           <a:latin typeface="Consolas"/>
                         </a:rPr>
-                        <a:t>encoder alone AUC 0.61 (honest)</a:t>
+                        <a:t>encoder alone AUC 0.49 (honest)</a:t>
                       </a:r>
                     </a:p>
                   </a:txBody>
@@ -7480,7 +7480,7 @@
                           </a:solidFill>
                           <a:latin typeface="Consolas"/>
                         </a:rPr>
-                        <a:t>0.963 next-operation acc</a:t>
+                        <a:t>0.998 next-operation acc</a:t>
                       </a:r>
                     </a:p>
                   </a:txBody>
@@ -7585,7 +7585,7 @@
                 </a:solidFill>
                 <a:latin typeface="Consolas"/>
               </a:rPr>
-              <a:t>operation 96% of the time</a:t>
+              <a:t>operation 99.8% of the time</a:t>
             </a:r>
             <a:r>
               <a:rPr sz="1300" b="0">
@@ -7648,7 +7648,7 @@
                 </a:solidFill>
                 <a:latin typeface="Arial"/>
               </a:rPr>
-              <a:t>real numbers from the organizer's official scorer on a held-out self-eval split, from the completed ProcSeq Leonardo run (base, 16k steps). The learned anomaly encoder alone is weak (AUC 0.61) — the physics hybrid carries Task 3. Organizer hidden-test and 4th-family OOD are pending.</a:t>
+              <a:t>real numbers from the organizer's official scorer on a held-out self-eval split, from the completed ProcSeq Leonardo run (base, 16k steps). The learned anomaly encoder alone is ~chance (AUC 0.49) — the physics hybrid carries Task 3. Organizer hidden-test and 4th-family OOD are pending.</a:t>
             </a:r>
           </a:p>
         </p:txBody>
@@ -7932,7 +7932,7 @@
                 </a:solidFill>
                 <a:latin typeface="Arial"/>
               </a:rPr>
-              <a:t>0.963 next-OPERATION accuracy — it predicts the right kind of step (deposit / etch / clean), not just a memorized name. That's process logic, not pattern recall.</a:t>
+              <a:t>0.998 next-OPERATION accuracy — it predicts the right kind of step (deposit / etch / clean), not just a memorized name. That's process logic, not pattern recall.</a:t>
             </a:r>
           </a:p>
         </p:txBody>
@@ -8162,7 +8162,7 @@
                 </a:solidFill>
                 <a:latin typeface="Arial"/>
               </a:rPr>
-              <a:t>The learned anomaly encoder alone is ~chance (AUC 0.61); the physics hybrid supplies the exact in-distribution verdict. We show both numbers, not just the flattering one.</a:t>
+              <a:t>The learned anomaly encoder alone is ~chance (AUC 0.49); the physics hybrid supplies the exact verdict (F1 1.0, rule-attr 0.97). We show both, not just the flattering one.</a:t>
             </a:r>
           </a:p>
         </p:txBody>

--- a/tracks/industrial-infineon/solution/pitch/ProcSeq_Pitch.pptx
+++ b/tracks/industrial-infineon/solution/pitch/ProcSeq_Pitch.pptx
@@ -7338,7 +7338,7 @@
                           </a:solidFill>
                           <a:latin typeface="Consolas"/>
                         </a:rPr>
-                        <a:t>Block-level 0.94  ·  100% rule-valid</a:t>
+                        <a:t>Block 0.94  ·  100% rule-valid</a:t>
                       </a:r>
                     </a:p>
                   </a:txBody>
@@ -7361,7 +7361,7 @@
                           </a:solidFill>
                           <a:latin typeface="Consolas"/>
                         </a:rPr>
-                        <a:t>token 0.71 · exact 0.28</a:t>
+                        <a:t>token 0.71 · exact 0.28 · cat-tok 0.83</a:t>
                       </a:r>
                     </a:p>
                   </a:txBody>
@@ -7552,7 +7552,7 @@
               </a:spcAft>
             </a:pPr>
             <a:r>
-              <a:rPr sz="1300" b="0">
+              <a:rPr sz="1200" b="0">
                 <a:solidFill>
                   <a:srgbClr val="9FB0C8"/>
                 </a:solidFill>
@@ -7561,7 +7561,7 @@
               <a:t>learns </a:t>
             </a:r>
             <a:r>
-              <a:rPr sz="1300" b="1">
+              <a:rPr sz="1200" b="1">
                 <a:solidFill>
                   <a:srgbClr val="FF5A45"/>
                 </a:solidFill>
@@ -7570,7 +7570,7 @@
               <a:t>function</a:t>
             </a:r>
             <a:r>
-              <a:rPr sz="1300" b="0">
+              <a:rPr sz="1200" b="0">
                 <a:solidFill>
                   <a:srgbClr val="9FB0C8"/>
                 </a:solidFill>
@@ -7579,7 +7579,7 @@
               <a:t>, not just names: predicts the right </a:t>
             </a:r>
             <a:r>
-              <a:rPr sz="1300" b="1">
+              <a:rPr sz="1200" b="1">
                 <a:solidFill>
                   <a:srgbClr val="FF5A45"/>
                 </a:solidFill>
@@ -7588,13 +7588,13 @@
               <a:t>operation 99.8% of the time</a:t>
             </a:r>
             <a:r>
-              <a:rPr sz="1300" b="0">
+              <a:rPr sz="1200" b="0">
                 <a:solidFill>
                   <a:srgbClr val="9FB0C8"/>
                 </a:solidFill>
                 <a:latin typeface="Consolas"/>
               </a:rPr>
-              <a:t>   ·   completions are 100% rule-valid</a:t>
+              <a:t>   ·   100% rule-valid   ·   per-family T1: IGBT .955 / MOSFET .945 / IC .910</a:t>
             </a:r>
           </a:p>
         </p:txBody>
